--- a/assets/powerpoints/module-n2-autobus/E1-je-me-lance.pptx
+++ b/assets/powerpoints/module-n2-autobus/E1-je-me-lance.pptx
@@ -7412,7 +7412,25 @@
                 </a:solidFill>
                 <a:latin typeface="Verdana"/>
               </a:rPr>
-              <a:t>On la garde à la main jusqu'au second autobus. Si on ne connaît pas le mot, on peut demander : « &lt;b&gt;C'est quoi, une correspondance ?&lt;/b&gt; »</a:t>
+              <a:t>On la garde à la main jusqu'au second autobus. Si on ne connaît pas le mot, on peut demander : « </a:t>
+            </a:r>
+            <a:r>
+              <a:rPr sz="2000" b="1" i="0">
+                <a:solidFill>
+                  <a:srgbClr val="4B4F52"/>
+                </a:solidFill>
+                <a:latin typeface="Verdana"/>
+              </a:rPr>
+              <a:t>C'est quoi, une correspondance ?</a:t>
+            </a:r>
+            <a:r>
+              <a:rPr sz="2000" b="0" i="0">
+                <a:solidFill>
+                  <a:srgbClr val="4B4F52"/>
+                </a:solidFill>
+                <a:latin typeface="Verdana"/>
+              </a:rPr>
+              <a:t> »</a:t>
             </a:r>
           </a:p>
         </p:txBody>
